--- a/lecons/LSA/Hydrology/LSA_HYDRO_L27_Precipitation_as_the_Input_of_the_Drainage_Basin.pptx
+++ b/lecons/LSA/Hydrology/LSA_HYDRO_L27_Precipitation_as_the_Input_of_the_Drainage_Basin.pptx
@@ -6673,7 +6673,7 @@
                 <a:ea typeface="Times New Roman" pitchFamily="34" charset="-122"/>
                 <a:cs typeface="Times New Roman" pitchFamily="34" charset="-120"/>
               </a:rPr>
-              <a:t>Lesson 27: Precipitation as the Input of the Drainage Basin</a:t>
+              <a:t>Lesson 27</a:t>
             </a:r>
             <a:endParaRPr lang="en-US" sz="2600" dirty="0"/>
           </a:p>
